--- a/slides/day_3/6_ensemble_learning.pptx
+++ b/slides/day_3/6_ensemble_learning.pptx
@@ -504,7 +504,7 @@
           <a:p>
             <a:fld id="{3C10CED3-9D38-496E-A0C9-F8629E5A2A41}" type="datetimeFigureOut">
               <a:rPr lang="en-US" smtClean="0"/>
-              <a:t>3/3/2026</a:t>
+              <a:t>3/4/2026</a:t>
             </a:fld>
             <a:endParaRPr lang="en-US"/>
           </a:p>
@@ -669,7 +669,7 @@
           <a:p>
             <a:fld id="{566A7747-0984-4E12-9222-F6AC1BF9321E}" type="datetimeFigureOut">
               <a:rPr lang="en-US" smtClean="0"/>
-              <a:t>3/3/2026</a:t>
+              <a:t>3/4/2026</a:t>
             </a:fld>
             <a:endParaRPr lang="en-US"/>
           </a:p>
@@ -2291,7 +2291,7 @@
           <a:p>
             <a:fld id="{477A1531-9024-480F-9D7B-19915C1DCDF5}" type="datetimeFigureOut">
               <a:rPr lang="en-GB" smtClean="0"/>
-              <a:t>03/03/2026</a:t>
+              <a:t>04/03/2026</a:t>
             </a:fld>
             <a:endParaRPr lang="en-GB"/>
           </a:p>
@@ -2461,7 +2461,7 @@
           <a:p>
             <a:fld id="{477A1531-9024-480F-9D7B-19915C1DCDF5}" type="datetimeFigureOut">
               <a:rPr lang="en-GB" smtClean="0"/>
-              <a:t>03/03/2026</a:t>
+              <a:t>04/03/2026</a:t>
             </a:fld>
             <a:endParaRPr lang="en-GB"/>
           </a:p>
@@ -2641,7 +2641,7 @@
           <a:p>
             <a:fld id="{477A1531-9024-480F-9D7B-19915C1DCDF5}" type="datetimeFigureOut">
               <a:rPr lang="en-GB" smtClean="0"/>
-              <a:t>03/03/2026</a:t>
+              <a:t>04/03/2026</a:t>
             </a:fld>
             <a:endParaRPr lang="en-GB"/>
           </a:p>
@@ -2811,7 +2811,7 @@
           <a:p>
             <a:fld id="{477A1531-9024-480F-9D7B-19915C1DCDF5}" type="datetimeFigureOut">
               <a:rPr lang="en-GB" smtClean="0"/>
-              <a:t>03/03/2026</a:t>
+              <a:t>04/03/2026</a:t>
             </a:fld>
             <a:endParaRPr lang="en-GB"/>
           </a:p>
@@ -3057,7 +3057,7 @@
           <a:p>
             <a:fld id="{477A1531-9024-480F-9D7B-19915C1DCDF5}" type="datetimeFigureOut">
               <a:rPr lang="en-GB" smtClean="0"/>
-              <a:t>03/03/2026</a:t>
+              <a:t>04/03/2026</a:t>
             </a:fld>
             <a:endParaRPr lang="en-GB"/>
           </a:p>
@@ -3289,7 +3289,7 @@
           <a:p>
             <a:fld id="{477A1531-9024-480F-9D7B-19915C1DCDF5}" type="datetimeFigureOut">
               <a:rPr lang="en-GB" smtClean="0"/>
-              <a:t>03/03/2026</a:t>
+              <a:t>04/03/2026</a:t>
             </a:fld>
             <a:endParaRPr lang="en-GB"/>
           </a:p>
@@ -3656,7 +3656,7 @@
           <a:p>
             <a:fld id="{477A1531-9024-480F-9D7B-19915C1DCDF5}" type="datetimeFigureOut">
               <a:rPr lang="en-GB" smtClean="0"/>
-              <a:t>03/03/2026</a:t>
+              <a:t>04/03/2026</a:t>
             </a:fld>
             <a:endParaRPr lang="en-GB"/>
           </a:p>
@@ -3774,7 +3774,7 @@
           <a:p>
             <a:fld id="{477A1531-9024-480F-9D7B-19915C1DCDF5}" type="datetimeFigureOut">
               <a:rPr lang="en-GB" smtClean="0"/>
-              <a:t>03/03/2026</a:t>
+              <a:t>04/03/2026</a:t>
             </a:fld>
             <a:endParaRPr lang="en-GB"/>
           </a:p>
@@ -3869,7 +3869,7 @@
           <a:p>
             <a:fld id="{477A1531-9024-480F-9D7B-19915C1DCDF5}" type="datetimeFigureOut">
               <a:rPr lang="en-GB" smtClean="0"/>
-              <a:t>03/03/2026</a:t>
+              <a:t>04/03/2026</a:t>
             </a:fld>
             <a:endParaRPr lang="en-GB"/>
           </a:p>
@@ -4146,7 +4146,7 @@
           <a:p>
             <a:fld id="{477A1531-9024-480F-9D7B-19915C1DCDF5}" type="datetimeFigureOut">
               <a:rPr lang="en-GB" smtClean="0"/>
-              <a:t>03/03/2026</a:t>
+              <a:t>04/03/2026</a:t>
             </a:fld>
             <a:endParaRPr lang="en-GB"/>
           </a:p>
@@ -4399,7 +4399,7 @@
           <a:p>
             <a:fld id="{477A1531-9024-480F-9D7B-19915C1DCDF5}" type="datetimeFigureOut">
               <a:rPr lang="en-GB" smtClean="0"/>
-              <a:t>03/03/2026</a:t>
+              <a:t>04/03/2026</a:t>
             </a:fld>
             <a:endParaRPr lang="en-GB"/>
           </a:p>
@@ -4612,7 +4612,7 @@
           <a:p>
             <a:fld id="{477A1531-9024-480F-9D7B-19915C1DCDF5}" type="datetimeFigureOut">
               <a:rPr lang="en-GB" smtClean="0"/>
-              <a:t>03/03/2026</a:t>
+              <a:t>04/03/2026</a:t>
             </a:fld>
             <a:endParaRPr lang="en-GB"/>
           </a:p>
@@ -8474,26 +8474,13 @@
           <a:lstStyle/>
           <a:p>
             <a:r>
-              <a:rPr lang="en-US" sz="2800" i="1" dirty="0">
+              <a:rPr lang="en-GB" sz="2800" dirty="0">
                 <a:latin typeface="+mj-lt"/>
                 <a:ea typeface="Lato" panose="020B0604020202020204" pitchFamily="34" charset="0"/>
                 <a:cs typeface="Helvetica" panose="020B0604020202020204" pitchFamily="34" charset="0"/>
               </a:rPr>
-              <a:t>5</a:t>
-            </a:r>
-            <a:r>
-              <a:rPr lang="en-US" sz="2800" dirty="0">
-                <a:latin typeface="+mj-lt"/>
-                <a:ea typeface="Lato" panose="020B0604020202020204" pitchFamily="34" charset="0"/>
-                <a:cs typeface="Helvetica" panose="020B0604020202020204" pitchFamily="34" charset="0"/>
-              </a:rPr>
-              <a:t>-fold cross-validation</a:t>
-            </a:r>
-            <a:endParaRPr lang="en-GB" sz="2800" dirty="0">
-              <a:latin typeface="+mj-lt"/>
-              <a:ea typeface="Lato" panose="020B0604020202020204" pitchFamily="34" charset="0"/>
-              <a:cs typeface="Helvetica" panose="020B0604020202020204" pitchFamily="34" charset="0"/>
-            </a:endParaRPr>
+              <a:t>Validation hold-out set</a:t>
+            </a:r>
           </a:p>
         </p:txBody>
       </p:sp>
